--- a/presentations/06-agentic-patterns-with-spring-ai.pptx
+++ b/presentations/06-agentic-patterns-with-spring-ai.pptx
@@ -3103,45 +3103,6 @@
           </a:prstGeom>
         </p:spPr>
       </p:pic>
-      <p:sp>
-        <p:nvSpPr>
-          <p:cNvPr id="7" name="Text 4"/>
-          <p:cNvSpPr/>
-          <p:nvPr/>
-        </p:nvSpPr>
-        <p:spPr>
-          <a:xfrm>
-            <a:off x="548640" y="5815584"/>
-            <a:ext cx="11064240" cy="448056"/>
-          </a:xfrm>
-          <a:prstGeom prst="rect">
-            <a:avLst/>
-          </a:prstGeom>
-          <a:noFill/>
-          <a:ln/>
-        </p:spPr>
-        <p:txBody>
-          <a:bodyPr wrap="square" lIns="0" tIns="0" rIns="0" bIns="0" rtlCol="0" anchor="t"/>
-          <a:lstStyle/>
-          <a:p>
-            <a:pPr marL="0" indent="0">
-              <a:buNone/>
-            </a:pPr>
-            <a:r>
-              <a:rPr lang="en-US" sz="1800" b="1" dirty="0">
-                <a:solidFill>
-                  <a:srgbClr val="397C25"/>
-                </a:solidFill>
-                <a:latin typeface="Calibri" pitchFamily="34" charset="0"/>
-                <a:ea typeface="Calibri" pitchFamily="34" charset="-122"/>
-                <a:cs typeface="Calibri" pitchFamily="34" charset="-120"/>
-              </a:rPr>
-              <a:t>Exactly one handler runs: A = billing, B = technical, C = general. All use the same configured model.</a:t>
-            </a:r>
-            <a:endParaRPr lang="en-US" sz="1800" dirty="0"/>
-          </a:p>
-        </p:txBody>
-      </p:sp>
     </p:spTree>
   </p:cSld>
   <p:clrMapOvr>
@@ -3869,45 +3830,6 @@
           </a:p>
         </p:txBody>
       </p:sp>
-      <p:sp>
-        <p:nvSpPr>
-          <p:cNvPr id="15" name="Text 13"/>
-          <p:cNvSpPr/>
-          <p:nvPr/>
-        </p:nvSpPr>
-        <p:spPr>
-          <a:xfrm>
-            <a:off x="548640" y="5815584"/>
-            <a:ext cx="11064240" cy="448056"/>
-          </a:xfrm>
-          <a:prstGeom prst="rect">
-            <a:avLst/>
-          </a:prstGeom>
-          <a:noFill/>
-          <a:ln/>
-        </p:spPr>
-        <p:txBody>
-          <a:bodyPr wrap="square" lIns="0" tIns="0" rIns="0" bIns="0" rtlCol="0" anchor="t"/>
-          <a:lstStyle/>
-          <a:p>
-            <a:pPr marL="0" indent="0">
-              <a:buNone/>
-            </a:pPr>
-            <a:r>
-              <a:rPr lang="en-US" sz="1800" b="1" dirty="0">
-                <a:solidFill>
-                  <a:srgbClr val="397C25"/>
-                </a:solidFill>
-                <a:latin typeface="Calibri" pitchFamily="34" charset="0"/>
-                <a:ea typeface="Calibri" pitchFamily="34" charset="-122"/>
-                <a:cs typeface="Calibri" pitchFamily="34" charset="-120"/>
-              </a:rPr>
-              <a:t>A valid JSON shape does not guarantee a valid or appropriate route.</a:t>
-            </a:r>
-            <a:endParaRPr lang="en-US" sz="1800" dirty="0"/>
-          </a:p>
-        </p:txBody>
-      </p:sp>
     </p:spTree>
   </p:cSld>
   <p:clrMapOvr>
@@ -4635,45 +4557,6 @@
           </a:p>
         </p:txBody>
       </p:sp>
-      <p:sp>
-        <p:nvSpPr>
-          <p:cNvPr id="15" name="Text 13"/>
-          <p:cNvSpPr/>
-          <p:nvPr/>
-        </p:nvSpPr>
-        <p:spPr>
-          <a:xfrm>
-            <a:off x="548640" y="5815584"/>
-            <a:ext cx="11064240" cy="448056"/>
-          </a:xfrm>
-          <a:prstGeom prst="rect">
-            <a:avLst/>
-          </a:prstGeom>
-          <a:noFill/>
-          <a:ln/>
-        </p:spPr>
-        <p:txBody>
-          <a:bodyPr wrap="square" lIns="0" tIns="0" rIns="0" bIns="0" rtlCol="0" anchor="t"/>
-          <a:lstStyle/>
-          <a:p>
-            <a:pPr marL="0" indent="0">
-              <a:buNone/>
-            </a:pPr>
-            <a:r>
-              <a:rPr lang="en-US" sz="1800" b="1" dirty="0">
-                <a:solidFill>
-                  <a:srgbClr val="397C25"/>
-                </a:solidFill>
-                <a:latin typeface="Calibri" pitchFamily="34" charset="0"/>
-                <a:ea typeface="Calibri" pitchFamily="34" charset="-122"/>
-                <a:cs typeface="Calibri" pitchFamily="34" charset="-120"/>
-              </a:rPr>
-              <a:t>The current implementation has no confidence threshold or automatic fallback route.</a:t>
-            </a:r>
-            <a:endParaRPr lang="en-US" sz="1800" dirty="0"/>
-          </a:p>
-        </p:txBody>
-      </p:sp>
     </p:spTree>
   </p:cSld>
   <p:clrMapOvr>
@@ -5736,45 +5619,6 @@
           </a:p>
         </p:txBody>
       </p:sp>
-      <p:sp>
-        <p:nvSpPr>
-          <p:cNvPr id="31" name="Text 28"/>
-          <p:cNvSpPr/>
-          <p:nvPr/>
-        </p:nvSpPr>
-        <p:spPr>
-          <a:xfrm>
-            <a:off x="548640" y="5815584"/>
-            <a:ext cx="11064240" cy="448056"/>
-          </a:xfrm>
-          <a:prstGeom prst="rect">
-            <a:avLst/>
-          </a:prstGeom>
-          <a:noFill/>
-          <a:ln/>
-        </p:spPr>
-        <p:txBody>
-          <a:bodyPr wrap="square" lIns="0" tIns="0" rIns="0" bIns="0" rtlCol="0" anchor="t"/>
-          <a:lstStyle/>
-          <a:p>
-            <a:pPr marL="0" indent="0">
-              <a:buNone/>
-            </a:pPr>
-            <a:r>
-              <a:rPr lang="en-US" sz="1800" b="1" dirty="0">
-                <a:solidFill>
-                  <a:srgbClr val="397C25"/>
-                </a:solidFill>
-                <a:latin typeface="Calibri" pitchFamily="34" charset="0"/>
-                <a:ea typeface="Calibri" pitchFamily="34" charset="-122"/>
-                <a:cs typeface="Calibri" pitchFamily="34" charset="-120"/>
-              </a:rPr>
-              <a:t>The returned value contains planner analysis and worker outputs, not a synthesis or the typed task list.</a:t>
-            </a:r>
-            <a:endParaRPr lang="en-US" sz="1800" dirty="0"/>
-          </a:p>
-        </p:txBody>
-      </p:sp>
     </p:spTree>
   </p:cSld>
   <p:clrMapOvr>
@@ -6502,45 +6346,6 @@
           </a:p>
         </p:txBody>
       </p:sp>
-      <p:sp>
-        <p:nvSpPr>
-          <p:cNvPr id="15" name="Text 13"/>
-          <p:cNvSpPr/>
-          <p:nvPr/>
-        </p:nvSpPr>
-        <p:spPr>
-          <a:xfrm>
-            <a:off x="548640" y="5815584"/>
-            <a:ext cx="11064240" cy="448056"/>
-          </a:xfrm>
-          <a:prstGeom prst="rect">
-            <a:avLst/>
-          </a:prstGeom>
-          <a:noFill/>
-          <a:ln/>
-        </p:spPr>
-        <p:txBody>
-          <a:bodyPr wrap="square" lIns="0" tIns="0" rIns="0" bIns="0" rtlCol="0" anchor="t"/>
-          <a:lstStyle/>
-          <a:p>
-            <a:pPr marL="0" indent="0">
-              <a:buNone/>
-            </a:pPr>
-            <a:r>
-              <a:rPr lang="en-US" sz="1800" b="1" dirty="0">
-                <a:solidFill>
-                  <a:srgbClr val="397C25"/>
-                </a:solidFill>
-                <a:latin typeface="Calibri" pitchFamily="34" charset="0"/>
-                <a:ea typeface="Calibri" pitchFamily="34" charset="-122"/>
-                <a:cs typeface="Calibri" pitchFamily="34" charset="-120"/>
-              </a:rPr>
-              <a:t>Validate task count and content before using a model-generated plan in production.</a:t>
-            </a:r>
-            <a:endParaRPr lang="en-US" sz="1800" dirty="0"/>
-          </a:p>
-        </p:txBody>
-      </p:sp>
     </p:spTree>
   </p:cSld>
   <p:clrMapOvr>
@@ -7268,45 +7073,6 @@
           </a:p>
         </p:txBody>
       </p:sp>
-      <p:sp>
-        <p:nvSpPr>
-          <p:cNvPr id="15" name="Text 13"/>
-          <p:cNvSpPr/>
-          <p:nvPr/>
-        </p:nvSpPr>
-        <p:spPr>
-          <a:xfrm>
-            <a:off x="548640" y="5815584"/>
-            <a:ext cx="11064240" cy="448056"/>
-          </a:xfrm>
-          <a:prstGeom prst="rect">
-            <a:avLst/>
-          </a:prstGeom>
-          <a:noFill/>
-          <a:ln/>
-        </p:spPr>
-        <p:txBody>
-          <a:bodyPr wrap="square" lIns="0" tIns="0" rIns="0" bIns="0" rtlCol="0" anchor="t"/>
-          <a:lstStyle/>
-          <a:p>
-            <a:pPr marL="0" indent="0">
-              <a:buNone/>
-            </a:pPr>
-            <a:r>
-              <a:rPr lang="en-US" sz="1800" b="1" dirty="0">
-                <a:solidFill>
-                  <a:srgbClr val="397C25"/>
-                </a:solidFill>
-                <a:latin typeface="Calibri" pitchFamily="34" charset="0"/>
-                <a:ea typeface="Calibri" pitchFamily="34" charset="-122"/>
-                <a:cs typeface="Calibri" pitchFamily="34" charset="-120"/>
-              </a:rPr>
-              <a:t>For a plan of N tasks, this implementation makes 1 + N model calls.</a:t>
-            </a:r>
-            <a:endParaRPr lang="en-US" sz="1800" dirty="0"/>
-          </a:p>
-        </p:txBody>
-      </p:sp>
     </p:spTree>
   </p:cSld>
   <p:clrMapOvr>
@@ -8025,84 +7791,6 @@
           </a:p>
         </p:txBody>
       </p:sp>
-      <p:sp>
-        <p:nvSpPr>
-          <p:cNvPr id="21" name="Text 17"/>
-          <p:cNvSpPr/>
-          <p:nvPr/>
-        </p:nvSpPr>
-        <p:spPr>
-          <a:xfrm>
-            <a:off x="548640" y="5358384"/>
-            <a:ext cx="11064240" cy="301752"/>
-          </a:xfrm>
-          <a:prstGeom prst="rect">
-            <a:avLst/>
-          </a:prstGeom>
-          <a:noFill/>
-          <a:ln/>
-        </p:spPr>
-        <p:txBody>
-          <a:bodyPr wrap="square" lIns="0" tIns="0" rIns="0" bIns="0" rtlCol="0" anchor="t"/>
-          <a:lstStyle/>
-          <a:p>
-            <a:pPr marL="0" indent="0">
-              <a:buNone/>
-            </a:pPr>
-            <a:r>
-              <a:rPr lang="en-US" sz="1700" b="1" dirty="0">
-                <a:solidFill>
-                  <a:srgbClr val="397C25"/>
-                </a:solidFill>
-                <a:latin typeface="Calibri" pitchFamily="34" charset="0"/>
-                <a:ea typeface="Calibri" pitchFamily="34" charset="-122"/>
-                <a:cs typeface="Calibri" pitchFamily="34" charset="-120"/>
-              </a:rPr>
-              <a:t>Default cap: three generation/evaluation rounds, including the first draft.</a:t>
-            </a:r>
-            <a:endParaRPr lang="en-US" sz="1700" dirty="0"/>
-          </a:p>
-        </p:txBody>
-      </p:sp>
-      <p:sp>
-        <p:nvSpPr>
-          <p:cNvPr id="22" name="Text 18"/>
-          <p:cNvSpPr/>
-          <p:nvPr/>
-        </p:nvSpPr>
-        <p:spPr>
-          <a:xfrm>
-            <a:off x="548640" y="5815584"/>
-            <a:ext cx="11064240" cy="448056"/>
-          </a:xfrm>
-          <a:prstGeom prst="rect">
-            <a:avLst/>
-          </a:prstGeom>
-          <a:noFill/>
-          <a:ln/>
-        </p:spPr>
-        <p:txBody>
-          <a:bodyPr wrap="square" lIns="0" tIns="0" rIns="0" bIns="0" rtlCol="0" anchor="t"/>
-          <a:lstStyle/>
-          <a:p>
-            <a:pPr marL="0" indent="0">
-              <a:buNone/>
-            </a:pPr>
-            <a:r>
-              <a:rPr lang="en-US" sz="1800" b="1" dirty="0">
-                <a:solidFill>
-                  <a:srgbClr val="397C25"/>
-                </a:solidFill>
-                <a:latin typeface="Calibri" pitchFamily="34" charset="0"/>
-                <a:ea typeface="Calibri" pitchFamily="34" charset="-122"/>
-                <a:cs typeface="Calibri" pitchFamily="34" charset="-120"/>
-              </a:rPr>
-              <a:t>At the cap, the last draft is returned even without PASS. Completion does not mean acceptance.</a:t>
-            </a:r>
-            <a:endParaRPr lang="en-US" sz="1800" dirty="0"/>
-          </a:p>
-        </p:txBody>
-      </p:sp>
     </p:spTree>
   </p:cSld>
   <p:clrMapOvr>
@@ -8790,45 +8478,6 @@
           </a:p>
         </p:txBody>
       </p:sp>
-      <p:sp>
-        <p:nvSpPr>
-          <p:cNvPr id="15" name="Text 13"/>
-          <p:cNvSpPr/>
-          <p:nvPr/>
-        </p:nvSpPr>
-        <p:spPr>
-          <a:xfrm>
-            <a:off x="548640" y="5815584"/>
-            <a:ext cx="11064240" cy="448056"/>
-          </a:xfrm>
-          <a:prstGeom prst="rect">
-            <a:avLst/>
-          </a:prstGeom>
-          <a:noFill/>
-          <a:ln/>
-        </p:spPr>
-        <p:txBody>
-          <a:bodyPr wrap="square" lIns="0" tIns="0" rIns="0" bIns="0" rtlCol="0" anchor="t"/>
-          <a:lstStyle/>
-          <a:p>
-            <a:pPr marL="0" indent="0">
-              <a:buNone/>
-            </a:pPr>
-            <a:r>
-              <a:rPr lang="en-US" sz="1800" b="1" dirty="0">
-                <a:solidFill>
-                  <a:srgbClr val="397C25"/>
-                </a:solidFill>
-                <a:latin typeface="Calibri" pitchFamily="34" charset="0"/>
-                <a:ea typeface="Calibri" pitchFamily="34" charset="-122"/>
-                <a:cs typeface="Calibri" pitchFamily="34" charset="-120"/>
-              </a:rPr>
-              <a:t>An evaluator verdict is a model judgment, not a substitute for tests or schema checks.</a:t>
-            </a:r>
-            <a:endParaRPr lang="en-US" sz="1800" dirty="0"/>
-          </a:p>
-        </p:txBody>
-      </p:sp>
     </p:spTree>
   </p:cSld>
   <p:clrMapOvr>
@@ -9516,45 +9165,6 @@
           </a:p>
         </p:txBody>
       </p:sp>
-      <p:sp>
-        <p:nvSpPr>
-          <p:cNvPr id="15" name="Text 13"/>
-          <p:cNvSpPr/>
-          <p:nvPr/>
-        </p:nvSpPr>
-        <p:spPr>
-          <a:xfrm>
-            <a:off x="548640" y="5815584"/>
-            <a:ext cx="11064240" cy="448056"/>
-          </a:xfrm>
-          <a:prstGeom prst="rect">
-            <a:avLst/>
-          </a:prstGeom>
-          <a:noFill/>
-          <a:ln/>
-        </p:spPr>
-        <p:txBody>
-          <a:bodyPr wrap="square" lIns="0" tIns="0" rIns="0" bIns="0" rtlCol="0" anchor="t"/>
-          <a:lstStyle/>
-          <a:p>
-            <a:pPr marL="0" indent="0">
-              <a:buNone/>
-            </a:pPr>
-            <a:r>
-              <a:rPr lang="en-US" sz="1800" b="1" dirty="0">
-                <a:solidFill>
-                  <a:srgbClr val="397C25"/>
-                </a:solidFill>
-                <a:latin typeface="Calibri" pitchFamily="34" charset="0"/>
-                <a:ea typeface="Calibri" pitchFamily="34" charset="-122"/>
-                <a:cs typeface="Calibri" pitchFamily="34" charset="-120"/>
-              </a:rPr>
-              <a:t>A completed workflow is not proof that the output passed its quality criteria.</a:t>
-            </a:r>
-            <a:endParaRPr lang="en-US" sz="1800" dirty="0"/>
-          </a:p>
-        </p:txBody>
-      </p:sp>
     </p:spTree>
   </p:cSld>
   <p:clrMapOvr>
@@ -10253,45 +9863,6 @@
           </a:p>
         </p:txBody>
       </p:sp>
-      <p:sp>
-        <p:nvSpPr>
-          <p:cNvPr id="15" name="Text 13"/>
-          <p:cNvSpPr/>
-          <p:nvPr/>
-        </p:nvSpPr>
-        <p:spPr>
-          <a:xfrm>
-            <a:off x="548640" y="5815584"/>
-            <a:ext cx="11064240" cy="448056"/>
-          </a:xfrm>
-          <a:prstGeom prst="rect">
-            <a:avLst/>
-          </a:prstGeom>
-          <a:noFill/>
-          <a:ln/>
-        </p:spPr>
-        <p:txBody>
-          <a:bodyPr wrap="square" lIns="0" tIns="0" rIns="0" bIns="0" rtlCol="0" anchor="t"/>
-          <a:lstStyle/>
-          <a:p>
-            <a:pPr marL="0" indent="0">
-              <a:buNone/>
-            </a:pPr>
-            <a:r>
-              <a:rPr lang="en-US" sz="1800" b="1" dirty="0">
-                <a:solidFill>
-                  <a:srgbClr val="397C25"/>
-                </a:solidFill>
-                <a:latin typeface="Calibri" pitchFamily="34" charset="0"/>
-                <a:ea typeface="Calibri" pitchFamily="34" charset="-122"/>
-                <a:cs typeface="Calibri" pitchFamily="34" charset="-120"/>
-              </a:rPr>
-              <a:t>Advisor events expose the workflow's calls, not a production tracing or metrics system.</a:t>
-            </a:r>
-            <a:endParaRPr lang="en-US" sz="1800" dirty="0"/>
-          </a:p>
-        </p:txBody>
-      </p:sp>
     </p:spTree>
   </p:cSld>
   <p:clrMapOvr>
@@ -10939,45 +10510,6 @@
           </a:p>
         </p:txBody>
       </p:sp>
-      <p:sp>
-        <p:nvSpPr>
-          <p:cNvPr id="18" name="Text 16"/>
-          <p:cNvSpPr/>
-          <p:nvPr/>
-        </p:nvSpPr>
-        <p:spPr>
-          <a:xfrm>
-            <a:off x="548640" y="5815584"/>
-            <a:ext cx="11064240" cy="448056"/>
-          </a:xfrm>
-          <a:prstGeom prst="rect">
-            <a:avLst/>
-          </a:prstGeom>
-          <a:noFill/>
-          <a:ln/>
-        </p:spPr>
-        <p:txBody>
-          <a:bodyPr wrap="square" lIns="0" tIns="0" rIns="0" bIns="0" rtlCol="0" anchor="t"/>
-          <a:lstStyle/>
-          <a:p>
-            <a:pPr marL="0" indent="0">
-              <a:buNone/>
-            </a:pPr>
-            <a:r>
-              <a:rPr lang="en-US" sz="1800" b="1" dirty="0">
-                <a:solidFill>
-                  <a:srgbClr val="397C25"/>
-                </a:solidFill>
-                <a:latin typeface="Calibri" pitchFamily="34" charset="0"/>
-                <a:ea typeface="Calibri" pitchFamily="34" charset="-122"/>
-                <a:cs typeface="Calibri" pitchFamily="34" charset="-120"/>
-              </a:rPr>
-              <a:t>This module implements five bounded workflow patterns, with some model-driven decisions.</a:t>
-            </a:r>
-            <a:endParaRPr lang="en-US" sz="1800" dirty="0"/>
-          </a:p>
-        </p:txBody>
-      </p:sp>
     </p:spTree>
   </p:cSld>
   <p:clrMapOvr>
@@ -11625,45 +11157,6 @@
           </a:p>
         </p:txBody>
       </p:sp>
-      <p:sp>
-        <p:nvSpPr>
-          <p:cNvPr id="15" name="Text 13"/>
-          <p:cNvSpPr/>
-          <p:nvPr/>
-        </p:nvSpPr>
-        <p:spPr>
-          <a:xfrm>
-            <a:off x="548640" y="5815584"/>
-            <a:ext cx="11064240" cy="448056"/>
-          </a:xfrm>
-          <a:prstGeom prst="rect">
-            <a:avLst/>
-          </a:prstGeom>
-          <a:noFill/>
-          <a:ln/>
-        </p:spPr>
-        <p:txBody>
-          <a:bodyPr wrap="square" lIns="0" tIns="0" rIns="0" bIns="0" rtlCol="0" anchor="t"/>
-          <a:lstStyle/>
-          <a:p>
-            <a:pPr marL="0" indent="0">
-              <a:buNone/>
-            </a:pPr>
-            <a:r>
-              <a:rPr lang="en-US" sz="1800" b="1" dirty="0">
-                <a:solidFill>
-                  <a:srgbClr val="397C25"/>
-                </a:solidFill>
-                <a:latin typeface="Calibri" pitchFamily="34" charset="0"/>
-                <a:ea typeface="Calibri" pitchFamily="34" charset="-122"/>
-                <a:cs typeface="Calibri" pitchFamily="34" charset="-120"/>
-              </a:rPr>
-              <a:t>Measure end-to-end quality, cost, and latency against a simpler baseline.</a:t>
-            </a:r>
-            <a:endParaRPr lang="en-US" sz="1800" dirty="0"/>
-          </a:p>
-        </p:txBody>
-      </p:sp>
     </p:spTree>
   </p:cSld>
   <p:clrMapOvr>
@@ -12306,45 +11799,6 @@
           </a:p>
         </p:txBody>
       </p:sp>
-      <p:sp>
-        <p:nvSpPr>
-          <p:cNvPr id="18" name="Text 16"/>
-          <p:cNvSpPr/>
-          <p:nvPr/>
-        </p:nvSpPr>
-        <p:spPr>
-          <a:xfrm>
-            <a:off x="548640" y="5815584"/>
-            <a:ext cx="11064240" cy="448056"/>
-          </a:xfrm>
-          <a:prstGeom prst="rect">
-            <a:avLst/>
-          </a:prstGeom>
-          <a:noFill/>
-          <a:ln/>
-        </p:spPr>
-        <p:txBody>
-          <a:bodyPr wrap="square" lIns="0" tIns="0" rIns="0" bIns="0" rtlCol="0" anchor="t"/>
-          <a:lstStyle/>
-          <a:p>
-            <a:pPr marL="0" indent="0">
-              <a:buNone/>
-            </a:pPr>
-            <a:r>
-              <a:rPr lang="en-US" sz="1800" b="1" dirty="0">
-                <a:solidFill>
-                  <a:srgbClr val="397C25"/>
-                </a:solidFill>
-                <a:latin typeface="Calibri" pitchFamily="34" charset="0"/>
-                <a:ea typeface="Calibri" pitchFamily="34" charset="-122"/>
-                <a:cs typeface="Calibri" pitchFamily="34" charset="-120"/>
-              </a:rPr>
-              <a:t>REST endpoints use /api/agents; browser pattern pages use /patterns.</a:t>
-            </a:r>
-            <a:endParaRPr lang="en-US" sz="1800" dirty="0"/>
-          </a:p>
-        </p:txBody>
-      </p:sp>
     </p:spTree>
   </p:cSld>
   <p:clrMapOvr>
@@ -12419,14 +11873,98 @@
       </p:sp>
       <p:sp>
         <p:nvSpPr>
-          <p:cNvPr id="3" name="Text 1"/>
-          <p:cNvSpPr/>
-          <p:nvPr/>
-        </p:nvSpPr>
-        <p:spPr>
-          <a:xfrm>
-            <a:off x="548640" y="950976"/>
-            <a:ext cx="10972800" cy="1197864"/>
+          <p:cNvPr id="9" name="Text 6"/>
+          <p:cNvSpPr/>
+          <p:nvPr/>
+        </p:nvSpPr>
+        <p:spPr>
+          <a:xfrm>
+            <a:off x="548640" y="6400800"/>
+            <a:ext cx="9875520" cy="210312"/>
+          </a:xfrm>
+          <a:prstGeom prst="rect">
+            <a:avLst/>
+          </a:prstGeom>
+          <a:noFill/>
+          <a:ln/>
+        </p:spPr>
+        <p:txBody>
+          <a:bodyPr wrap="square" lIns="0" tIns="0" rIns="0" bIns="0" rtlCol="0" anchor="t"/>
+          <a:lstStyle/>
+          <a:p>
+            <a:pPr marL="0" indent="0">
+              <a:buNone/>
+            </a:pPr>
+            <a:r>
+              <a:rPr lang="en-US" sz="1050" dirty="0">
+                <a:solidFill>
+                  <a:srgbClr val="B9CBB9"/>
+                </a:solidFill>
+                <a:latin typeface="Calibri" pitchFamily="34" charset="0"/>
+                <a:ea typeface="Calibri" pitchFamily="34" charset="-122"/>
+                <a:cs typeface="Calibri" pitchFamily="34" charset="-120"/>
+              </a:rPr>
+              <a:t>SPRING AI FOR BEGINNERS  /  06 Agentic Patterns</a:t>
+            </a:r>
+            <a:endParaRPr lang="en-US" sz="1050" dirty="0"/>
+          </a:p>
+        </p:txBody>
+      </p:sp>
+      <p:sp>
+        <p:nvSpPr>
+          <p:cNvPr id="10" name="Text 7"/>
+          <p:cNvSpPr/>
+          <p:nvPr/>
+        </p:nvSpPr>
+        <p:spPr>
+          <a:xfrm>
+            <a:off x="10817352" y="6373368"/>
+            <a:ext cx="822960" cy="256032"/>
+          </a:xfrm>
+          <a:prstGeom prst="rect">
+            <a:avLst/>
+          </a:prstGeom>
+          <a:noFill/>
+          <a:ln/>
+        </p:spPr>
+        <p:txBody>
+          <a:bodyPr wrap="square" lIns="0" tIns="0" rIns="0" bIns="0" rtlCol="0" anchor="t"/>
+          <a:lstStyle/>
+          <a:p>
+            <a:pPr marL="0" indent="0" algn="r">
+              <a:buNone/>
+            </a:pPr>
+            <a:r>
+              <a:rPr lang="en-US" sz="1200" dirty="0">
+                <a:solidFill>
+                  <a:srgbClr val="B9CBB9"/>
+                </a:solidFill>
+                <a:latin typeface="Calibri" pitchFamily="34" charset="0"/>
+                <a:ea typeface="Calibri" pitchFamily="34" charset="-122"/>
+                <a:cs typeface="Calibri" pitchFamily="34" charset="-120"/>
+              </a:rPr>
+              <a:t>22 / 22</a:t>
+            </a:r>
+            <a:endParaRPr lang="en-US" sz="1200" dirty="0"/>
+          </a:p>
+        </p:txBody>
+      </p:sp>
+      <p:sp>
+        <p:nvSpPr>
+          <p:cNvPr id="12" name="Text 1">
+            <a:extLst>
+              <a:ext uri="{FF2B5EF4-FFF2-40B4-BE49-F238E27FC236}">
+                <a16:creationId xmlns:a16="http://schemas.microsoft.com/office/drawing/2014/main" id="{9E872420-166F-EF99-26B7-BD93948ABA76}"/>
+              </a:ext>
+            </a:extLst>
+          </p:cNvPr>
+          <p:cNvSpPr/>
+          <p:nvPr/>
+        </p:nvSpPr>
+        <p:spPr>
+          <a:xfrm>
+            <a:off x="645232" y="2888731"/>
+            <a:ext cx="1615011" cy="678201"/>
           </a:xfrm>
           <a:prstGeom prst="rect">
             <a:avLst/>
@@ -12450,132 +11988,21 @@
                 <a:ea typeface="Trebuchet MS" pitchFamily="34" charset="-122"/>
                 <a:cs typeface="Trebuchet MS" pitchFamily="34" charset="-120"/>
               </a:rPr>
-              <a:t>Build one workflow with measurable acceptance criteria</a:t>
+              <a:t>Demo</a:t>
             </a:r>
             <a:endParaRPr lang="en-US" sz="4000" dirty="0"/>
-          </a:p>
-        </p:txBody>
-      </p:sp>
-      <p:sp>
-        <p:nvSpPr>
-          <p:cNvPr id="4" name="Text 2"/>
-          <p:cNvSpPr/>
-          <p:nvPr/>
-        </p:nvSpPr>
-        <p:spPr>
-          <a:xfrm>
-            <a:off x="548640" y="2423160"/>
-            <a:ext cx="4572000" cy="850392"/>
-          </a:xfrm>
-          <a:prstGeom prst="rect">
-            <a:avLst/>
-          </a:prstGeom>
-          <a:noFill/>
-          <a:ln/>
-        </p:spPr>
-        <p:txBody>
-          <a:bodyPr wrap="square" lIns="0" tIns="0" rIns="0" bIns="0" rtlCol="0" anchor="t"/>
-          <a:lstStyle/>
-          <a:p>
-            <a:pPr marL="0" indent="0">
-              <a:buNone/>
-            </a:pPr>
-            <a:r>
-              <a:rPr lang="en-US" sz="2100" dirty="0">
-                <a:solidFill>
-                  <a:srgbClr val="FFFFFF"/>
-                </a:solidFill>
-                <a:latin typeface="Calibri" pitchFamily="34" charset="0"/>
-                <a:ea typeface="Calibri" pitchFamily="34" charset="-122"/>
-                <a:cs typeface="Calibri" pitchFamily="34" charset="-120"/>
-              </a:rPr>
-              <a:t>Start with a real task and a single-call baseline.</a:t>
-            </a:r>
-            <a:endParaRPr lang="en-US" sz="2100" dirty="0"/>
-          </a:p>
-        </p:txBody>
-      </p:sp>
-      <p:sp>
-        <p:nvSpPr>
-          <p:cNvPr id="5" name="Text 3"/>
-          <p:cNvSpPr/>
-          <p:nvPr/>
-        </p:nvSpPr>
-        <p:spPr>
-          <a:xfrm>
-            <a:off x="548640" y="3410712"/>
-            <a:ext cx="4572000" cy="850392"/>
-          </a:xfrm>
-          <a:prstGeom prst="rect">
-            <a:avLst/>
-          </a:prstGeom>
-          <a:noFill/>
-          <a:ln/>
-        </p:spPr>
-        <p:txBody>
-          <a:bodyPr wrap="square" lIns="0" tIns="0" rIns="0" bIns="0" rtlCol="0" anchor="t"/>
-          <a:lstStyle/>
-          <a:p>
-            <a:pPr marL="0" indent="0">
-              <a:buNone/>
-            </a:pPr>
-            <a:r>
-              <a:rPr lang="en-US" sz="2100" dirty="0">
-                <a:solidFill>
-                  <a:srgbClr val="FFFFFF"/>
-                </a:solidFill>
-                <a:latin typeface="Calibri" pitchFamily="34" charset="0"/>
-                <a:ea typeface="Calibri" pitchFamily="34" charset="-122"/>
-                <a:cs typeface="Calibri" pitchFamily="34" charset="-120"/>
-              </a:rPr>
-              <a:t>Choose a pattern and add deterministic checks at key boundaries.</a:t>
-            </a:r>
-            <a:endParaRPr lang="en-US" sz="2100" dirty="0"/>
-          </a:p>
-        </p:txBody>
-      </p:sp>
-      <p:sp>
-        <p:nvSpPr>
-          <p:cNvPr id="6" name="Text 4"/>
-          <p:cNvSpPr/>
-          <p:nvPr/>
-        </p:nvSpPr>
-        <p:spPr>
-          <a:xfrm>
-            <a:off x="548640" y="4398264"/>
-            <a:ext cx="4572000" cy="850392"/>
-          </a:xfrm>
-          <a:prstGeom prst="rect">
-            <a:avLst/>
-          </a:prstGeom>
-          <a:noFill/>
-          <a:ln/>
-        </p:spPr>
-        <p:txBody>
-          <a:bodyPr wrap="square" lIns="0" tIns="0" rIns="0" bIns="0" rtlCol="0" anchor="t"/>
-          <a:lstStyle/>
-          <a:p>
-            <a:pPr marL="0" indent="0">
-              <a:buNone/>
-            </a:pPr>
-            <a:r>
-              <a:rPr lang="en-US" sz="2100" dirty="0">
-                <a:solidFill>
-                  <a:srgbClr val="FFFFFF"/>
-                </a:solidFill>
-                <a:latin typeface="Calibri" pitchFamily="34" charset="0"/>
-                <a:ea typeface="Calibri" pitchFamily="34" charset="-122"/>
-                <a:cs typeface="Calibri" pitchFamily="34" charset="-120"/>
-              </a:rPr>
-              <a:t>Add memory, retrieval, local tools, or MCP only where the task needs them.</a:t>
-            </a:r>
-            <a:endParaRPr lang="en-US" sz="2100" dirty="0"/>
           </a:p>
         </p:txBody>
       </p:sp>
       <p:pic>
         <p:nvPicPr>
-          <p:cNvPr id="7" name="Image 0" descr="agentic systems overview"/>
+          <p:cNvPr id="14" name="Picture 13" descr="QR Code">
+            <a:extLst>
+              <a:ext uri="{FF2B5EF4-FFF2-40B4-BE49-F238E27FC236}">
+                <a16:creationId xmlns:a16="http://schemas.microsoft.com/office/drawing/2014/main" id="{E3187775-6A95-83C7-49FF-240FD89EEFDE}"/>
+              </a:ext>
+            </a:extLst>
+          </p:cNvPr>
           <p:cNvPicPr>
             <a:picLocks noChangeAspect="1"/>
           </p:cNvPicPr>
@@ -12589,8 +12016,8 @@
         </p:blipFill>
         <p:spPr>
           <a:xfrm>
-            <a:off x="5486400" y="2407303"/>
-            <a:ext cx="6153912" cy="3104098"/>
+            <a:off x="3574694" y="675763"/>
+            <a:ext cx="5143500" cy="5143500"/>
           </a:xfrm>
           <a:prstGeom prst="rect">
             <a:avLst/>
@@ -12599,118 +12026,40 @@
       </p:pic>
       <p:sp>
         <p:nvSpPr>
-          <p:cNvPr id="8" name="Text 5"/>
-          <p:cNvSpPr/>
-          <p:nvPr/>
-        </p:nvSpPr>
-        <p:spPr>
-          <a:xfrm>
-            <a:off x="548640" y="5815584"/>
-            <a:ext cx="11064240" cy="448056"/>
-          </a:xfrm>
-          <a:prstGeom prst="rect">
-            <a:avLst/>
-          </a:prstGeom>
-          <a:noFill/>
-          <a:ln/>
-        </p:spPr>
-        <p:txBody>
-          <a:bodyPr wrap="square" lIns="0" tIns="0" rIns="0" bIns="0" rtlCol="0" anchor="t"/>
-          <a:lstStyle/>
-          <a:p>
-            <a:pPr marL="0" indent="0">
-              <a:buNone/>
-            </a:pPr>
-            <a:r>
-              <a:rPr lang="en-US" sz="1800" b="1" dirty="0">
-                <a:solidFill>
-                  <a:srgbClr val="86CF54"/>
-                </a:solidFill>
-                <a:latin typeface="Calibri" pitchFamily="34" charset="0"/>
-                <a:ea typeface="Calibri" pitchFamily="34" charset="-122"/>
-                <a:cs typeface="Calibri" pitchFamily="34" charset="-120"/>
-              </a:rPr>
-              <a:t>Keep the workflow observable, bounded, and grounded in application-owned rules.</a:t>
-            </a:r>
-            <a:endParaRPr lang="en-US" sz="1800" dirty="0"/>
-          </a:p>
-        </p:txBody>
-      </p:sp>
-      <p:sp>
-        <p:nvSpPr>
-          <p:cNvPr id="9" name="Text 6"/>
-          <p:cNvSpPr/>
-          <p:nvPr/>
-        </p:nvSpPr>
-        <p:spPr>
-          <a:xfrm>
-            <a:off x="548640" y="6400800"/>
-            <a:ext cx="9875520" cy="210312"/>
-          </a:xfrm>
-          <a:prstGeom prst="rect">
-            <a:avLst/>
-          </a:prstGeom>
-          <a:noFill/>
-          <a:ln/>
-        </p:spPr>
-        <p:txBody>
-          <a:bodyPr wrap="square" lIns="0" tIns="0" rIns="0" bIns="0" rtlCol="0" anchor="t"/>
-          <a:lstStyle/>
-          <a:p>
-            <a:pPr marL="0" indent="0">
-              <a:buNone/>
-            </a:pPr>
-            <a:r>
-              <a:rPr lang="en-US" sz="1050" dirty="0">
-                <a:solidFill>
-                  <a:srgbClr val="B9CBB9"/>
-                </a:solidFill>
-                <a:latin typeface="Calibri" pitchFamily="34" charset="0"/>
-                <a:ea typeface="Calibri" pitchFamily="34" charset="-122"/>
-                <a:cs typeface="Calibri" pitchFamily="34" charset="-120"/>
-              </a:rPr>
-              <a:t>SPRING AI FOR BEGINNERS  /  06 Agentic Patterns</a:t>
-            </a:r>
-            <a:endParaRPr lang="en-US" sz="1050" dirty="0"/>
-          </a:p>
-        </p:txBody>
-      </p:sp>
-      <p:sp>
-        <p:nvSpPr>
-          <p:cNvPr id="10" name="Text 7"/>
-          <p:cNvSpPr/>
-          <p:nvPr/>
-        </p:nvSpPr>
-        <p:spPr>
-          <a:xfrm>
-            <a:off x="10817352" y="6373368"/>
-            <a:ext cx="822960" cy="256032"/>
-          </a:xfrm>
-          <a:prstGeom prst="rect">
-            <a:avLst/>
-          </a:prstGeom>
-          <a:noFill/>
-          <a:ln/>
-        </p:spPr>
-        <p:txBody>
-          <a:bodyPr wrap="square" lIns="0" tIns="0" rIns="0" bIns="0" rtlCol="0" anchor="t"/>
-          <a:lstStyle/>
-          <a:p>
-            <a:pPr marL="0" indent="0" algn="r">
-              <a:buNone/>
-            </a:pPr>
-            <a:r>
-              <a:rPr lang="en-US" sz="1200" dirty="0">
-                <a:solidFill>
-                  <a:srgbClr val="B9CBB9"/>
-                </a:solidFill>
-                <a:latin typeface="Calibri" pitchFamily="34" charset="0"/>
-                <a:ea typeface="Calibri" pitchFamily="34" charset="-122"/>
-                <a:cs typeface="Calibri" pitchFamily="34" charset="-120"/>
-              </a:rPr>
-              <a:t>22 / 22</a:t>
-            </a:r>
-            <a:endParaRPr lang="en-US" sz="1200" dirty="0"/>
+          <p:cNvPr id="16" name="TextBox 15">
+            <a:extLst>
+              <a:ext uri="{FF2B5EF4-FFF2-40B4-BE49-F238E27FC236}">
+                <a16:creationId xmlns:a16="http://schemas.microsoft.com/office/drawing/2014/main" id="{3BF97AAD-DCF5-344F-6BA0-47030EE5A3E6}"/>
+              </a:ext>
+            </a:extLst>
+          </p:cNvPr>
+          <p:cNvSpPr txBox="1"/>
+          <p:nvPr/>
+        </p:nvSpPr>
+        <p:spPr>
+          <a:xfrm>
+            <a:off x="2869576" y="5816025"/>
+            <a:ext cx="6553736" cy="584775"/>
+          </a:xfrm>
+          <a:prstGeom prst="rect">
+            <a:avLst/>
+          </a:prstGeom>
+          <a:noFill/>
+        </p:spPr>
+        <p:txBody>
+          <a:bodyPr wrap="square">
+            <a:spAutoFit/>
+          </a:bodyPr>
+          <a:lstStyle/>
+          <a:p>
+            <a:r>
+              <a:rPr lang="en-ZA" sz="3200" dirty="0">
+                <a:solidFill>
+                  <a:schemeClr val="bg2"/>
+                </a:solidFill>
+              </a:rPr>
+              <a:t>http://aka.ms/Spring-AI-for-Beginners</a:t>
+            </a:r>
           </a:p>
         </p:txBody>
       </p:sp>
@@ -12919,7 +12268,7 @@
         </p:blipFill>
         <p:spPr>
           <a:xfrm>
-            <a:off x="548640" y="1792171"/>
+            <a:off x="2621280" y="1875884"/>
             <a:ext cx="6949440" cy="3639418"/>
           </a:xfrm>
           <a:prstGeom prst="rect">
@@ -12927,279 +12276,6 @@
           </a:prstGeom>
         </p:spPr>
       </p:pic>
-      <p:sp>
-        <p:nvSpPr>
-          <p:cNvPr id="7" name="Text 4"/>
-          <p:cNvSpPr/>
-          <p:nvPr/>
-        </p:nvSpPr>
-        <p:spPr>
-          <a:xfrm>
-            <a:off x="7909560" y="1819656"/>
-            <a:ext cx="3730752" cy="457200"/>
-          </a:xfrm>
-          <a:prstGeom prst="rect">
-            <a:avLst/>
-          </a:prstGeom>
-          <a:noFill/>
-          <a:ln/>
-        </p:spPr>
-        <p:txBody>
-          <a:bodyPr wrap="square" lIns="0" tIns="0" rIns="0" bIns="0" rtlCol="0" anchor="t"/>
-          <a:lstStyle/>
-          <a:p>
-            <a:pPr marL="0" indent="0">
-              <a:buNone/>
-            </a:pPr>
-            <a:r>
-              <a:rPr lang="en-US" sz="2200" b="1" dirty="0">
-                <a:solidFill>
-                  <a:srgbClr val="397C25"/>
-                </a:solidFill>
-                <a:latin typeface="Calibri" pitchFamily="34" charset="0"/>
-                <a:ea typeface="Calibri" pitchFamily="34" charset="-122"/>
-                <a:cs typeface="Calibri" pitchFamily="34" charset="-120"/>
-              </a:rPr>
-              <a:t>Recorded input</a:t>
-            </a:r>
-            <a:endParaRPr lang="en-US" sz="2200" dirty="0"/>
-          </a:p>
-        </p:txBody>
-      </p:sp>
-      <p:sp>
-        <p:nvSpPr>
-          <p:cNvPr id="8" name="Text 5"/>
-          <p:cNvSpPr/>
-          <p:nvPr/>
-        </p:nvSpPr>
-        <p:spPr>
-          <a:xfrm>
-            <a:off x="7909560" y="2295144"/>
-            <a:ext cx="3730752" cy="728472"/>
-          </a:xfrm>
-          <a:prstGeom prst="rect">
-            <a:avLst/>
-          </a:prstGeom>
-          <a:noFill/>
-          <a:ln/>
-        </p:spPr>
-        <p:txBody>
-          <a:bodyPr wrap="square" lIns="0" tIns="0" rIns="0" bIns="0" rtlCol="0" anchor="t"/>
-          <a:lstStyle/>
-          <a:p>
-            <a:pPr marL="0" indent="0">
-              <a:buNone/>
-            </a:pPr>
-            <a:r>
-              <a:rPr lang="en-US" sz="1900" dirty="0">
-                <a:solidFill>
-                  <a:srgbClr val="202A25"/>
-                </a:solidFill>
-                <a:latin typeface="Calibri" pitchFamily="34" charset="0"/>
-                <a:ea typeface="Calibri" pitchFamily="34" charset="-122"/>
-                <a:cs typeface="Calibri" pitchFamily="34" charset="-120"/>
-              </a:rPr>
-              <a:t>Three metrics: 92%, 45%, and 87%.</a:t>
-            </a:r>
-            <a:endParaRPr lang="en-US" sz="1900" dirty="0"/>
-          </a:p>
-        </p:txBody>
-      </p:sp>
-      <p:sp>
-        <p:nvSpPr>
-          <p:cNvPr id="9" name="Text 6"/>
-          <p:cNvSpPr/>
-          <p:nvPr/>
-        </p:nvSpPr>
-        <p:spPr>
-          <a:xfrm>
-            <a:off x="7909560" y="3069336"/>
-            <a:ext cx="3730752" cy="457200"/>
-          </a:xfrm>
-          <a:prstGeom prst="rect">
-            <a:avLst/>
-          </a:prstGeom>
-          <a:noFill/>
-          <a:ln/>
-        </p:spPr>
-        <p:txBody>
-          <a:bodyPr wrap="square" lIns="0" tIns="0" rIns="0" bIns="0" rtlCol="0" anchor="t"/>
-          <a:lstStyle/>
-          <a:p>
-            <a:pPr marL="0" indent="0">
-              <a:buNone/>
-            </a:pPr>
-            <a:r>
-              <a:rPr lang="en-US" sz="2200" b="1" dirty="0">
-                <a:solidFill>
-                  <a:srgbClr val="397C25"/>
-                </a:solidFill>
-                <a:latin typeface="Calibri" pitchFamily="34" charset="0"/>
-                <a:ea typeface="Calibri" pitchFamily="34" charset="-122"/>
-                <a:cs typeface="Calibri" pitchFamily="34" charset="-120"/>
-              </a:rPr>
-              <a:t>Observed result</a:t>
-            </a:r>
-            <a:endParaRPr lang="en-US" sz="2200" dirty="0"/>
-          </a:p>
-        </p:txBody>
-      </p:sp>
-      <p:sp>
-        <p:nvSpPr>
-          <p:cNvPr id="10" name="Text 7"/>
-          <p:cNvSpPr/>
-          <p:nvPr/>
-        </p:nvSpPr>
-        <p:spPr>
-          <a:xfrm>
-            <a:off x="7909560" y="3544824"/>
-            <a:ext cx="3730752" cy="728472"/>
-          </a:xfrm>
-          <a:prstGeom prst="rect">
-            <a:avLst/>
-          </a:prstGeom>
-          <a:noFill/>
-          <a:ln/>
-        </p:spPr>
-        <p:txBody>
-          <a:bodyPr wrap="square" lIns="0" tIns="0" rIns="0" bIns="0" rtlCol="0" anchor="t"/>
-          <a:lstStyle/>
-          <a:p>
-            <a:pPr marL="0" indent="0">
-              <a:buNone/>
-            </a:pPr>
-            <a:r>
-              <a:rPr lang="en-US" sz="1900" dirty="0">
-                <a:solidFill>
-                  <a:srgbClr val="202A25"/>
-                </a:solidFill>
-                <a:latin typeface="Calibri" pitchFamily="34" charset="0"/>
-                <a:ea typeface="Calibri" pitchFamily="34" charset="-122"/>
-                <a:cs typeface="Calibri" pitchFamily="34" charset="-120"/>
-              </a:rPr>
-              <a:t>Four calls; final table ordered 92%, 87%, 45%.</a:t>
-            </a:r>
-            <a:endParaRPr lang="en-US" sz="1900" dirty="0"/>
-          </a:p>
-        </p:txBody>
-      </p:sp>
-      <p:sp>
-        <p:nvSpPr>
-          <p:cNvPr id="11" name="Text 8"/>
-          <p:cNvSpPr/>
-          <p:nvPr/>
-        </p:nvSpPr>
-        <p:spPr>
-          <a:xfrm>
-            <a:off x="7909560" y="4319016"/>
-            <a:ext cx="3730752" cy="457200"/>
-          </a:xfrm>
-          <a:prstGeom prst="rect">
-            <a:avLst/>
-          </a:prstGeom>
-          <a:noFill/>
-          <a:ln/>
-        </p:spPr>
-        <p:txBody>
-          <a:bodyPr wrap="square" lIns="0" tIns="0" rIns="0" bIns="0" rtlCol="0" anchor="t"/>
-          <a:lstStyle/>
-          <a:p>
-            <a:pPr marL="0" indent="0">
-              <a:buNone/>
-            </a:pPr>
-            <a:r>
-              <a:rPr lang="en-US" sz="2200" b="1" dirty="0">
-                <a:solidFill>
-                  <a:srgbClr val="397C25"/>
-                </a:solidFill>
-                <a:latin typeface="Calibri" pitchFamily="34" charset="0"/>
-                <a:ea typeface="Calibri" pitchFamily="34" charset="-122"/>
-                <a:cs typeface="Calibri" pitchFamily="34" charset="-120"/>
-              </a:rPr>
-              <a:t>Trace every stage</a:t>
-            </a:r>
-            <a:endParaRPr lang="en-US" sz="2200" dirty="0"/>
-          </a:p>
-        </p:txBody>
-      </p:sp>
-      <p:sp>
-        <p:nvSpPr>
-          <p:cNvPr id="12" name="Text 9"/>
-          <p:cNvSpPr/>
-          <p:nvPr/>
-        </p:nvSpPr>
-        <p:spPr>
-          <a:xfrm>
-            <a:off x="7909560" y="4794504"/>
-            <a:ext cx="3730752" cy="728472"/>
-          </a:xfrm>
-          <a:prstGeom prst="rect">
-            <a:avLst/>
-          </a:prstGeom>
-          <a:noFill/>
-          <a:ln/>
-        </p:spPr>
-        <p:txBody>
-          <a:bodyPr wrap="square" lIns="0" tIns="0" rIns="0" bIns="0" rtlCol="0" anchor="t"/>
-          <a:lstStyle/>
-          <a:p>
-            <a:pPr marL="0" indent="0">
-              <a:buNone/>
-            </a:pPr>
-            <a:r>
-              <a:rPr lang="en-US" sz="1900" dirty="0">
-                <a:solidFill>
-                  <a:srgbClr val="202A25"/>
-                </a:solidFill>
-                <a:latin typeface="Calibri" pitchFamily="34" charset="0"/>
-                <a:ea typeface="Calibri" pitchFamily="34" charset="-122"/>
-                <a:cs typeface="Calibri" pitchFamily="34" charset="-120"/>
-              </a:rPr>
-              <a:t>The recorded outputs appear on slide 7.</a:t>
-            </a:r>
-            <a:endParaRPr lang="en-US" sz="1900" dirty="0"/>
-          </a:p>
-        </p:txBody>
-      </p:sp>
-      <p:sp>
-        <p:nvSpPr>
-          <p:cNvPr id="13" name="Text 10"/>
-          <p:cNvSpPr/>
-          <p:nvPr/>
-        </p:nvSpPr>
-        <p:spPr>
-          <a:xfrm>
-            <a:off x="548640" y="5815584"/>
-            <a:ext cx="11064240" cy="448056"/>
-          </a:xfrm>
-          <a:prstGeom prst="rect">
-            <a:avLst/>
-          </a:prstGeom>
-          <a:noFill/>
-          <a:ln/>
-        </p:spPr>
-        <p:txBody>
-          <a:bodyPr wrap="square" lIns="0" tIns="0" rIns="0" bIns="0" rtlCol="0" anchor="t"/>
-          <a:lstStyle/>
-          <a:p>
-            <a:pPr marL="0" indent="0">
-              <a:buNone/>
-            </a:pPr>
-            <a:r>
-              <a:rPr lang="en-US" sz="1800" b="1" dirty="0">
-                <a:solidFill>
-                  <a:srgbClr val="397C25"/>
-                </a:solidFill>
-                <a:latin typeface="Calibri" pitchFamily="34" charset="0"/>
-                <a:ea typeface="Calibri" pitchFamily="34" charset="-122"/>
-                <a:cs typeface="Calibri" pitchFamily="34" charset="-120"/>
-              </a:rPr>
-              <a:t>UI shown before execution; the accompanying result was recorded via /api/agents/chain on 7 Sep 2026.</a:t>
-            </a:r>
-            <a:endParaRPr lang="en-US" sz="1800" dirty="0"/>
-          </a:p>
-        </p:txBody>
-      </p:sp>
     </p:spTree>
   </p:cSld>
   <p:clrMapOvr>
@@ -13958,45 +13034,6 @@
           </a:p>
         </p:txBody>
       </p:sp>
-      <p:sp>
-        <p:nvSpPr>
-          <p:cNvPr id="15" name="Text 13"/>
-          <p:cNvSpPr/>
-          <p:nvPr/>
-        </p:nvSpPr>
-        <p:spPr>
-          <a:xfrm>
-            <a:off x="548640" y="5815584"/>
-            <a:ext cx="11064240" cy="448056"/>
-          </a:xfrm>
-          <a:prstGeom prst="rect">
-            <a:avLst/>
-          </a:prstGeom>
-          <a:noFill/>
-          <a:ln/>
-        </p:spPr>
-        <p:txBody>
-          <a:bodyPr wrap="square" lIns="0" tIns="0" rIns="0" bIns="0" rtlCol="0" anchor="t"/>
-          <a:lstStyle/>
-          <a:p>
-            <a:pPr marL="0" indent="0">
-              <a:buNone/>
-            </a:pPr>
-            <a:r>
-              <a:rPr lang="en-US" sz="1800" b="1" dirty="0">
-                <a:solidFill>
-                  <a:srgbClr val="397C25"/>
-                </a:solidFill>
-                <a:latin typeface="Calibri" pitchFamily="34" charset="0"/>
-                <a:ea typeface="Calibri" pitchFamily="34" charset="-122"/>
-                <a:cs typeface="Calibri" pitchFamily="34" charset="-120"/>
-              </a:rPr>
-              <a:t>The differences are orchestration and prompts, not separate provider stacks.</a:t>
-            </a:r>
-            <a:endParaRPr lang="en-US" sz="1800" dirty="0"/>
-          </a:p>
-        </p:txBody>
-      </p:sp>
     </p:spTree>
   </p:cSld>
   <p:clrMapOvr>
@@ -14998,45 +14035,6 @@
           </a:p>
         </p:txBody>
       </p:sp>
-      <p:sp>
-        <p:nvSpPr>
-          <p:cNvPr id="29" name="Text 26"/>
-          <p:cNvSpPr/>
-          <p:nvPr/>
-        </p:nvSpPr>
-        <p:spPr>
-          <a:xfrm>
-            <a:off x="548640" y="5815584"/>
-            <a:ext cx="11064240" cy="448056"/>
-          </a:xfrm>
-          <a:prstGeom prst="rect">
-            <a:avLst/>
-          </a:prstGeom>
-          <a:noFill/>
-          <a:ln/>
-        </p:spPr>
-        <p:txBody>
-          <a:bodyPr wrap="square" lIns="0" tIns="0" rIns="0" bIns="0" rtlCol="0" anchor="t"/>
-          <a:lstStyle/>
-          <a:p>
-            <a:pPr marL="0" indent="0">
-              <a:buNone/>
-            </a:pPr>
-            <a:r>
-              <a:rPr lang="en-US" sz="1800" b="1" dirty="0">
-                <a:solidFill>
-                  <a:srgbClr val="397C25"/>
-                </a:solidFill>
-                <a:latin typeface="Calibri" pitchFamily="34" charset="0"/>
-                <a:ea typeface="Calibri" pitchFamily="34" charset="-122"/>
-                <a:cs typeface="Calibri" pitchFamily="34" charset="-120"/>
-              </a:rPr>
-              <a:t>Every stage consumes the preceding result. This implementation has no validation gate.</a:t>
-            </a:r>
-            <a:endParaRPr lang="en-US" sz="1800" dirty="0"/>
-          </a:p>
-        </p:txBody>
-      </p:sp>
     </p:spTree>
   </p:cSld>
   <p:clrMapOvr>
@@ -15755,45 +14753,6 @@
           </a:p>
         </p:txBody>
       </p:sp>
-      <p:sp>
-        <p:nvSpPr>
-          <p:cNvPr id="15" name="Text 13"/>
-          <p:cNvSpPr/>
-          <p:nvPr/>
-        </p:nvSpPr>
-        <p:spPr>
-          <a:xfrm>
-            <a:off x="548640" y="5815584"/>
-            <a:ext cx="11064240" cy="448056"/>
-          </a:xfrm>
-          <a:prstGeom prst="rect">
-            <a:avLst/>
-          </a:prstGeom>
-          <a:noFill/>
-          <a:ln/>
-        </p:spPr>
-        <p:txBody>
-          <a:bodyPr wrap="square" lIns="0" tIns="0" rIns="0" bIns="0" rtlCol="0" anchor="t"/>
-          <a:lstStyle/>
-          <a:p>
-            <a:pPr marL="0" indent="0">
-              <a:buNone/>
-            </a:pPr>
-            <a:r>
-              <a:rPr lang="en-US" sz="1800" b="1" dirty="0">
-                <a:solidFill>
-                  <a:srgbClr val="397C25"/>
-                </a:solidFill>
-                <a:latin typeface="Calibri" pitchFamily="34" charset="0"/>
-                <a:ea typeface="Calibri" pitchFamily="34" charset="-122"/>
-                <a:cs typeface="Calibri" pitchFamily="34" charset="-120"/>
-              </a:rPr>
-              <a:t>The class returns a log of the input and every stage output, not just the last answer.</a:t>
-            </a:r>
-            <a:endParaRPr lang="en-US" sz="1800" dirty="0"/>
-          </a:p>
-        </p:txBody>
-      </p:sp>
     </p:spTree>
   </p:cSld>
   <p:clrMapOvr>
@@ -16965,45 +15924,6 @@
           </a:p>
         </p:txBody>
       </p:sp>
-      <p:sp>
-        <p:nvSpPr>
-          <p:cNvPr id="30" name="Text 28"/>
-          <p:cNvSpPr/>
-          <p:nvPr/>
-        </p:nvSpPr>
-        <p:spPr>
-          <a:xfrm>
-            <a:off x="548640" y="5815584"/>
-            <a:ext cx="11064240" cy="448056"/>
-          </a:xfrm>
-          <a:prstGeom prst="rect">
-            <a:avLst/>
-          </a:prstGeom>
-          <a:noFill/>
-          <a:ln/>
-        </p:spPr>
-        <p:txBody>
-          <a:bodyPr wrap="square" lIns="0" tIns="0" rIns="0" bIns="0" rtlCol="0" anchor="t"/>
-          <a:lstStyle/>
-          <a:p>
-            <a:pPr marL="0" indent="0">
-              <a:buNone/>
-            </a:pPr>
-            <a:r>
-              <a:rPr lang="en-US" sz="1800" b="1" dirty="0">
-                <a:solidFill>
-                  <a:srgbClr val="397C25"/>
-                </a:solidFill>
-                <a:latin typeface="Calibri" pitchFamily="34" charset="0"/>
-                <a:ea typeface="Calibri" pitchFamily="34" charset="-122"/>
-                <a:cs typeface="Calibri" pitchFamily="34" charset="-120"/>
-              </a:rPr>
-              <a:t>Observed response from POST /api/agents/chain. All values were retained; only their order and format changed.</a:t>
-            </a:r>
-            <a:endParaRPr lang="en-US" sz="1800" dirty="0"/>
-          </a:p>
-        </p:txBody>
-      </p:sp>
     </p:spTree>
   </p:cSld>
   <p:clrMapOvr>
@@ -18058,45 +16978,6 @@
           </a:p>
         </p:txBody>
       </p:sp>
-      <p:sp>
-        <p:nvSpPr>
-          <p:cNvPr id="33" name="Text 28"/>
-          <p:cNvSpPr/>
-          <p:nvPr/>
-        </p:nvSpPr>
-        <p:spPr>
-          <a:xfrm>
-            <a:off x="548640" y="5815584"/>
-            <a:ext cx="11064240" cy="448056"/>
-          </a:xfrm>
-          <a:prstGeom prst="rect">
-            <a:avLst/>
-          </a:prstGeom>
-          <a:noFill/>
-          <a:ln/>
-        </p:spPr>
-        <p:txBody>
-          <a:bodyPr wrap="square" lIns="0" tIns="0" rIns="0" bIns="0" rtlCol="0" anchor="t"/>
-          <a:lstStyle/>
-          <a:p>
-            <a:pPr marL="0" indent="0">
-              <a:buNone/>
-            </a:pPr>
-            <a:r>
-              <a:rPr lang="en-US" sz="1800" b="1" dirty="0">
-                <a:solidFill>
-                  <a:srgbClr val="397C25"/>
-                </a:solidFill>
-                <a:latin typeface="Calibri" pitchFamily="34" charset="0"/>
-                <a:ea typeface="Calibri" pitchFamily="34" charset="-122"/>
-                <a:cs typeface="Calibri" pitchFamily="34" charset="-120"/>
-              </a:rPr>
-              <a:t>The demo gathers results in input order using Java; there is no extra LLM aggregator or vote.</a:t>
-            </a:r>
-            <a:endParaRPr lang="en-US" sz="1800" dirty="0"/>
-          </a:p>
-        </p:txBody>
-      </p:sp>
     </p:spTree>
   </p:cSld>
   <p:clrMapOvr>
@@ -18852,45 +17733,6 @@
               <a:t>The demo uses inputs.size() workers; add limits for production.</a:t>
             </a:r>
             <a:endParaRPr lang="en-US" sz="1900" dirty="0"/>
-          </a:p>
-        </p:txBody>
-      </p:sp>
-      <p:sp>
-        <p:nvSpPr>
-          <p:cNvPr id="15" name="Text 13"/>
-          <p:cNvSpPr/>
-          <p:nvPr/>
-        </p:nvSpPr>
-        <p:spPr>
-          <a:xfrm>
-            <a:off x="548640" y="5815584"/>
-            <a:ext cx="11064240" cy="448056"/>
-          </a:xfrm>
-          <a:prstGeom prst="rect">
-            <a:avLst/>
-          </a:prstGeom>
-          <a:noFill/>
-          <a:ln/>
-        </p:spPr>
-        <p:txBody>
-          <a:bodyPr wrap="square" lIns="0" tIns="0" rIns="0" bIns="0" rtlCol="0" anchor="t"/>
-          <a:lstStyle/>
-          <a:p>
-            <a:pPr marL="0" indent="0">
-              <a:buNone/>
-            </a:pPr>
-            <a:r>
-              <a:rPr lang="en-US" sz="1800" b="1" dirty="0">
-                <a:solidFill>
-                  <a:srgbClr val="397C25"/>
-                </a:solidFill>
-                <a:latin typeface="Calibri" pitchFamily="34" charset="0"/>
-                <a:ea typeface="Calibri" pitchFamily="34" charset="-122"/>
-                <a:cs typeface="Calibri" pitchFamily="34" charset="-120"/>
-              </a:rPr>
-              <a:t>Parallel wall time can approach the slowest call, but quotas and failures still matter.</a:t>
-            </a:r>
-            <a:endParaRPr lang="en-US" sz="1800" dirty="0"/>
           </a:p>
         </p:txBody>
       </p:sp>
